--- a/docs/presentations/Claude_Appendix.pptx
+++ b/docs/presentations/Claude_Appendix.pptx
@@ -6248,1068 +6248,6 @@
 
 <file path=ppt/slides/slide16.xml><?xml version="1.0" encoding="utf-8"?>
 <p:sld xmlns:a="http://schemas.openxmlformats.org/drawingml/2006/main" xmlns:r="http://schemas.openxmlformats.org/officeDocument/2006/relationships" xmlns:p="http://schemas.openxmlformats.org/presentationml/2006/main">
-  <p:cSld name="Slide 15">
-    <p:bg>
-      <p:bgPr>
-        <a:solidFill>
-          <a:srgbClr val="1E2530"/>
-        </a:solidFill>
-        <a:effectLst/>
-      </p:bgPr>
-    </p:bg>
-    <p:spTree>
-      <p:nvGrpSpPr>
-        <p:cNvPr id="1" name=""/>
-        <p:cNvGrpSpPr/>
-        <p:nvPr/>
-      </p:nvGrpSpPr>
-      <p:grpSpPr>
-        <a:xfrm>
-          <a:off x="0" y="0"/>
-          <a:ext cx="0" cy="0"/>
-          <a:chOff x="0" y="0"/>
-          <a:chExt cx="0" cy="0"/>
-        </a:xfrm>
-      </p:grpSpPr>
-      <p:sp>
-        <p:nvSpPr>
-          <p:cNvPr id="2" name="Shape 0"/>
-          <p:cNvSpPr/>
-          <p:nvPr/>
-        </p:nvSpPr>
-        <p:spPr>
-          <a:xfrm>
-            <a:off x="0" y="0"/>
-            <a:ext cx="9144000" cy="36576"/>
-          </a:xfrm>
-          <a:prstGeom prst="rect">
-            <a:avLst/>
-          </a:prstGeom>
-          <a:solidFill>
-            <a:srgbClr val="B8975C"/>
-          </a:solidFill>
-          <a:ln/>
-        </p:spPr>
-        <p:txBody>
-          <a:bodyPr/>
-          <a:lstStyle/>
-          <a:p>
-            <a:endParaRPr lang="en-US"/>
-          </a:p>
-        </p:txBody>
-      </p:sp>
-      <p:sp>
-        <p:nvSpPr>
-          <p:cNvPr id="3" name="Text 1"/>
-          <p:cNvSpPr/>
-          <p:nvPr/>
-        </p:nvSpPr>
-        <p:spPr>
-          <a:xfrm>
-            <a:off x="731520" y="411480"/>
-            <a:ext cx="7680960" cy="457200"/>
-          </a:xfrm>
-          <a:prstGeom prst="rect">
-            <a:avLst/>
-          </a:prstGeom>
-          <a:noFill/>
-          <a:ln/>
-        </p:spPr>
-        <p:txBody>
-          <a:bodyPr wrap="square" lIns="0" tIns="0" rIns="0" bIns="0" rtlCol="0" anchor="ctr"/>
-          <a:lstStyle/>
-          <a:p>
-            <a:pPr marL="0" indent="0">
-              <a:buNone/>
-            </a:pPr>
-            <a:r>
-              <a:rPr lang="en-US" sz="2800" b="1" dirty="0">
-                <a:solidFill>
-                  <a:srgbClr val="FFFFFF"/>
-                </a:solidFill>
-                <a:latin typeface="Open Sans" pitchFamily="34" charset="0"/>
-                <a:ea typeface="Open Sans" pitchFamily="34" charset="-122"/>
-                <a:cs typeface="Open Sans" pitchFamily="34" charset="-120"/>
-              </a:rPr>
-              <a:t>Quick Reference</a:t>
-            </a:r>
-            <a:endParaRPr lang="en-US" sz="2800" dirty="0"/>
-          </a:p>
-        </p:txBody>
-      </p:sp>
-      <p:sp>
-        <p:nvSpPr>
-          <p:cNvPr id="4" name="Text 2"/>
-          <p:cNvSpPr/>
-          <p:nvPr/>
-        </p:nvSpPr>
-        <p:spPr>
-          <a:xfrm>
-            <a:off x="731520" y="1051560"/>
-            <a:ext cx="3657600" cy="320040"/>
-          </a:xfrm>
-          <a:prstGeom prst="rect">
-            <a:avLst/>
-          </a:prstGeom>
-          <a:noFill/>
-          <a:ln/>
-        </p:spPr>
-        <p:txBody>
-          <a:bodyPr wrap="square" lIns="0" tIns="0" rIns="0" bIns="0" rtlCol="0" anchor="ctr"/>
-          <a:lstStyle/>
-          <a:p>
-            <a:pPr marL="0" indent="0">
-              <a:buNone/>
-            </a:pPr>
-            <a:r>
-              <a:rPr lang="en-US" sz="1400" b="1" dirty="0">
-                <a:solidFill>
-                  <a:srgbClr val="B8975C"/>
-                </a:solidFill>
-                <a:latin typeface="Open Sans" pitchFamily="34" charset="0"/>
-                <a:ea typeface="Open Sans" pitchFamily="34" charset="-122"/>
-                <a:cs typeface="Open Sans" pitchFamily="34" charset="-120"/>
-              </a:rPr>
-              <a:t>Useful Links</a:t>
-            </a:r>
-            <a:endParaRPr lang="en-US" sz="1400" dirty="0"/>
-          </a:p>
-        </p:txBody>
-      </p:sp>
-      <p:sp>
-        <p:nvSpPr>
-          <p:cNvPr id="5" name="Text 3"/>
-          <p:cNvSpPr/>
-          <p:nvPr/>
-        </p:nvSpPr>
-        <p:spPr>
-          <a:xfrm>
-            <a:off x="731520" y="1508760"/>
-            <a:ext cx="2743200" cy="182880"/>
-          </a:xfrm>
-          <a:prstGeom prst="rect">
-            <a:avLst/>
-          </a:prstGeom>
-          <a:noFill/>
-          <a:ln/>
-        </p:spPr>
-        <p:txBody>
-          <a:bodyPr wrap="square" lIns="0" tIns="0" rIns="0" bIns="0" rtlCol="0" anchor="ctr"/>
-          <a:lstStyle/>
-          <a:p>
-            <a:pPr marL="0" indent="0">
-              <a:buNone/>
-            </a:pPr>
-            <a:r>
-              <a:rPr lang="en-US" sz="1100" dirty="0">
-                <a:solidFill>
-                  <a:srgbClr val="B8975C"/>
-                </a:solidFill>
-                <a:latin typeface="Consolas" pitchFamily="34" charset="0"/>
-                <a:ea typeface="Consolas" pitchFamily="34" charset="-122"/>
-                <a:cs typeface="Consolas" pitchFamily="34" charset="-120"/>
-              </a:rPr>
-              <a:t>claude.ai</a:t>
-            </a:r>
-            <a:endParaRPr lang="en-US" sz="1100" dirty="0"/>
-          </a:p>
-        </p:txBody>
-      </p:sp>
-      <p:sp>
-        <p:nvSpPr>
-          <p:cNvPr id="6" name="Text 4"/>
-          <p:cNvSpPr/>
-          <p:nvPr/>
-        </p:nvSpPr>
-        <p:spPr>
-          <a:xfrm>
-            <a:off x="731520" y="1691640"/>
-            <a:ext cx="3657600" cy="182880"/>
-          </a:xfrm>
-          <a:prstGeom prst="rect">
-            <a:avLst/>
-          </a:prstGeom>
-          <a:noFill/>
-          <a:ln/>
-        </p:spPr>
-        <p:txBody>
-          <a:bodyPr wrap="square" lIns="0" tIns="0" rIns="0" bIns="0" rtlCol="0" anchor="ctr"/>
-          <a:lstStyle/>
-          <a:p>
-            <a:pPr marL="0" indent="0">
-              <a:buNone/>
-            </a:pPr>
-            <a:r>
-              <a:rPr lang="en-US" sz="1000" dirty="0">
-                <a:solidFill>
-                  <a:srgbClr val="8A9BAD"/>
-                </a:solidFill>
-                <a:latin typeface="Open Sans" pitchFamily="34" charset="0"/>
-                <a:ea typeface="Open Sans" pitchFamily="34" charset="-122"/>
-                <a:cs typeface="Open Sans" pitchFamily="34" charset="-120"/>
-              </a:rPr>
-              <a:t>Web interface (free sign-up)</a:t>
-            </a:r>
-            <a:endParaRPr lang="en-US" sz="1000" dirty="0"/>
-          </a:p>
-        </p:txBody>
-      </p:sp>
-      <p:sp>
-        <p:nvSpPr>
-          <p:cNvPr id="7" name="Text 5"/>
-          <p:cNvSpPr/>
-          <p:nvPr/>
-        </p:nvSpPr>
-        <p:spPr>
-          <a:xfrm>
-            <a:off x="731520" y="1920240"/>
-            <a:ext cx="2743200" cy="182880"/>
-          </a:xfrm>
-          <a:prstGeom prst="rect">
-            <a:avLst/>
-          </a:prstGeom>
-          <a:noFill/>
-          <a:ln/>
-        </p:spPr>
-        <p:txBody>
-          <a:bodyPr wrap="square" lIns="0" tIns="0" rIns="0" bIns="0" rtlCol="0" anchor="ctr"/>
-          <a:lstStyle/>
-          <a:p>
-            <a:pPr marL="0" indent="0">
-              <a:buNone/>
-            </a:pPr>
-            <a:r>
-              <a:rPr lang="en-US" sz="1100" dirty="0">
-                <a:solidFill>
-                  <a:srgbClr val="B8975C"/>
-                </a:solidFill>
-                <a:latin typeface="Consolas" pitchFamily="34" charset="0"/>
-                <a:ea typeface="Consolas" pitchFamily="34" charset="-122"/>
-                <a:cs typeface="Consolas" pitchFamily="34" charset="-120"/>
-              </a:rPr>
-              <a:t>claude.ai/download</a:t>
-            </a:r>
-            <a:endParaRPr lang="en-US" sz="1100" dirty="0"/>
-          </a:p>
-        </p:txBody>
-      </p:sp>
-      <p:sp>
-        <p:nvSpPr>
-          <p:cNvPr id="8" name="Text 6"/>
-          <p:cNvSpPr/>
-          <p:nvPr/>
-        </p:nvSpPr>
-        <p:spPr>
-          <a:xfrm>
-            <a:off x="731520" y="2103120"/>
-            <a:ext cx="3657600" cy="182880"/>
-          </a:xfrm>
-          <a:prstGeom prst="rect">
-            <a:avLst/>
-          </a:prstGeom>
-          <a:noFill/>
-          <a:ln/>
-        </p:spPr>
-        <p:txBody>
-          <a:bodyPr wrap="square" lIns="0" tIns="0" rIns="0" bIns="0" rtlCol="0" anchor="ctr"/>
-          <a:lstStyle/>
-          <a:p>
-            <a:pPr marL="0" indent="0">
-              <a:buNone/>
-            </a:pPr>
-            <a:r>
-              <a:rPr lang="en-US" sz="1000" dirty="0">
-                <a:solidFill>
-                  <a:srgbClr val="8A9BAD"/>
-                </a:solidFill>
-                <a:latin typeface="Open Sans" pitchFamily="34" charset="0"/>
-                <a:ea typeface="Open Sans" pitchFamily="34" charset="-122"/>
-                <a:cs typeface="Open Sans" pitchFamily="34" charset="-120"/>
-              </a:rPr>
-              <a:t>Desktop app (Mac &amp; Windows)</a:t>
-            </a:r>
-            <a:endParaRPr lang="en-US" sz="1000" dirty="0"/>
-          </a:p>
-        </p:txBody>
-      </p:sp>
-      <p:sp>
-        <p:nvSpPr>
-          <p:cNvPr id="9" name="Text 7"/>
-          <p:cNvSpPr/>
-          <p:nvPr/>
-        </p:nvSpPr>
-        <p:spPr>
-          <a:xfrm>
-            <a:off x="731520" y="2331720"/>
-            <a:ext cx="2743200" cy="182880"/>
-          </a:xfrm>
-          <a:prstGeom prst="rect">
-            <a:avLst/>
-          </a:prstGeom>
-          <a:noFill/>
-          <a:ln/>
-        </p:spPr>
-        <p:txBody>
-          <a:bodyPr wrap="square" lIns="0" tIns="0" rIns="0" bIns="0" rtlCol="0" anchor="ctr"/>
-          <a:lstStyle/>
-          <a:p>
-            <a:pPr marL="0" indent="0">
-              <a:buNone/>
-            </a:pPr>
-            <a:r>
-              <a:rPr lang="en-US" sz="1100" dirty="0">
-                <a:solidFill>
-                  <a:srgbClr val="B8975C"/>
-                </a:solidFill>
-                <a:latin typeface="Consolas" pitchFamily="34" charset="0"/>
-                <a:ea typeface="Consolas" pitchFamily="34" charset="-122"/>
-                <a:cs typeface="Consolas" pitchFamily="34" charset="-120"/>
-              </a:rPr>
-              <a:t>docs.anthropic.com</a:t>
-            </a:r>
-            <a:endParaRPr lang="en-US" sz="1100" dirty="0"/>
-          </a:p>
-        </p:txBody>
-      </p:sp>
-      <p:sp>
-        <p:nvSpPr>
-          <p:cNvPr id="10" name="Text 8"/>
-          <p:cNvSpPr/>
-          <p:nvPr/>
-        </p:nvSpPr>
-        <p:spPr>
-          <a:xfrm>
-            <a:off x="731520" y="2514600"/>
-            <a:ext cx="3657600" cy="182880"/>
-          </a:xfrm>
-          <a:prstGeom prst="rect">
-            <a:avLst/>
-          </a:prstGeom>
-          <a:noFill/>
-          <a:ln/>
-        </p:spPr>
-        <p:txBody>
-          <a:bodyPr wrap="square" lIns="0" tIns="0" rIns="0" bIns="0" rtlCol="0" anchor="ctr"/>
-          <a:lstStyle/>
-          <a:p>
-            <a:pPr marL="0" indent="0">
-              <a:buNone/>
-            </a:pPr>
-            <a:r>
-              <a:rPr lang="en-US" sz="1000" dirty="0">
-                <a:solidFill>
-                  <a:srgbClr val="8A9BAD"/>
-                </a:solidFill>
-                <a:latin typeface="Open Sans" pitchFamily="34" charset="0"/>
-                <a:ea typeface="Open Sans" pitchFamily="34" charset="-122"/>
-                <a:cs typeface="Open Sans" pitchFamily="34" charset="-120"/>
-              </a:rPr>
-              <a:t>Official Claude documentation</a:t>
-            </a:r>
-            <a:endParaRPr lang="en-US" sz="1000" dirty="0"/>
-          </a:p>
-        </p:txBody>
-      </p:sp>
-      <p:sp>
-        <p:nvSpPr>
-          <p:cNvPr id="11" name="Text 9"/>
-          <p:cNvSpPr/>
-          <p:nvPr/>
-        </p:nvSpPr>
-        <p:spPr>
-          <a:xfrm>
-            <a:off x="731520" y="2743200"/>
-            <a:ext cx="2743200" cy="182880"/>
-          </a:xfrm>
-          <a:prstGeom prst="rect">
-            <a:avLst/>
-          </a:prstGeom>
-          <a:noFill/>
-          <a:ln/>
-        </p:spPr>
-        <p:txBody>
-          <a:bodyPr wrap="square" lIns="0" tIns="0" rIns="0" bIns="0" rtlCol="0" anchor="ctr"/>
-          <a:lstStyle/>
-          <a:p>
-            <a:pPr marL="0" indent="0">
-              <a:buNone/>
-            </a:pPr>
-            <a:r>
-              <a:rPr lang="en-US" sz="1100" dirty="0">
-                <a:solidFill>
-                  <a:srgbClr val="B8975C"/>
-                </a:solidFill>
-                <a:latin typeface="Consolas" pitchFamily="34" charset="0"/>
-                <a:ea typeface="Consolas" pitchFamily="34" charset="-122"/>
-                <a:cs typeface="Consolas" pitchFamily="34" charset="-120"/>
-              </a:rPr>
-              <a:t>claude.ai/code</a:t>
-            </a:r>
-            <a:endParaRPr lang="en-US" sz="1100" dirty="0"/>
-          </a:p>
-        </p:txBody>
-      </p:sp>
-      <p:sp>
-        <p:nvSpPr>
-          <p:cNvPr id="12" name="Text 10"/>
-          <p:cNvSpPr/>
-          <p:nvPr/>
-        </p:nvSpPr>
-        <p:spPr>
-          <a:xfrm>
-            <a:off x="731520" y="2926080"/>
-            <a:ext cx="3657600" cy="182880"/>
-          </a:xfrm>
-          <a:prstGeom prst="rect">
-            <a:avLst/>
-          </a:prstGeom>
-          <a:noFill/>
-          <a:ln/>
-        </p:spPr>
-        <p:txBody>
-          <a:bodyPr wrap="square" lIns="0" tIns="0" rIns="0" bIns="0" rtlCol="0" anchor="ctr"/>
-          <a:lstStyle/>
-          <a:p>
-            <a:pPr marL="0" indent="0">
-              <a:buNone/>
-            </a:pPr>
-            <a:r>
-              <a:rPr lang="en-US" sz="1000" dirty="0">
-                <a:solidFill>
-                  <a:srgbClr val="8A9BAD"/>
-                </a:solidFill>
-                <a:latin typeface="Open Sans" pitchFamily="34" charset="0"/>
-                <a:ea typeface="Open Sans" pitchFamily="34" charset="-122"/>
-                <a:cs typeface="Open Sans" pitchFamily="34" charset="-120"/>
-              </a:rPr>
-              <a:t>Claude Code (CLI tool)</a:t>
-            </a:r>
-            <a:endParaRPr lang="en-US" sz="1000" dirty="0"/>
-          </a:p>
-        </p:txBody>
-      </p:sp>
-      <p:sp>
-        <p:nvSpPr>
-          <p:cNvPr id="13" name="Text 11"/>
-          <p:cNvSpPr/>
-          <p:nvPr/>
-        </p:nvSpPr>
-        <p:spPr>
-          <a:xfrm>
-            <a:off x="731520" y="3154680"/>
-            <a:ext cx="2743200" cy="182880"/>
-          </a:xfrm>
-          <a:prstGeom prst="rect">
-            <a:avLst/>
-          </a:prstGeom>
-          <a:noFill/>
-          <a:ln/>
-        </p:spPr>
-        <p:txBody>
-          <a:bodyPr wrap="square" lIns="0" tIns="0" rIns="0" bIns="0" rtlCol="0" anchor="ctr"/>
-          <a:lstStyle/>
-          <a:p>
-            <a:pPr marL="0" indent="0">
-              <a:buNone/>
-            </a:pPr>
-            <a:r>
-              <a:rPr lang="en-US" sz="1100" dirty="0">
-                <a:solidFill>
-                  <a:srgbClr val="B8975C"/>
-                </a:solidFill>
-                <a:latin typeface="Consolas" pitchFamily="34" charset="0"/>
-                <a:ea typeface="Consolas" pitchFamily="34" charset="-122"/>
-                <a:cs typeface="Consolas" pitchFamily="34" charset="-120"/>
-              </a:rPr>
-              <a:t>npmjs.com/package/@anthropic-ai/claude-code</a:t>
-            </a:r>
-            <a:endParaRPr lang="en-US" sz="1100" dirty="0"/>
-          </a:p>
-        </p:txBody>
-      </p:sp>
-      <p:sp>
-        <p:nvSpPr>
-          <p:cNvPr id="14" name="Text 12"/>
-          <p:cNvSpPr/>
-          <p:nvPr/>
-        </p:nvSpPr>
-        <p:spPr>
-          <a:xfrm>
-            <a:off x="731520" y="3337560"/>
-            <a:ext cx="3657600" cy="182880"/>
-          </a:xfrm>
-          <a:prstGeom prst="rect">
-            <a:avLst/>
-          </a:prstGeom>
-          <a:noFill/>
-          <a:ln/>
-        </p:spPr>
-        <p:txBody>
-          <a:bodyPr wrap="square" lIns="0" tIns="0" rIns="0" bIns="0" rtlCol="0" anchor="ctr"/>
-          <a:lstStyle/>
-          <a:p>
-            <a:pPr marL="0" indent="0">
-              <a:buNone/>
-            </a:pPr>
-            <a:r>
-              <a:rPr lang="en-US" sz="1000" dirty="0">
-                <a:solidFill>
-                  <a:srgbClr val="8A9BAD"/>
-                </a:solidFill>
-                <a:latin typeface="Open Sans" pitchFamily="34" charset="0"/>
-                <a:ea typeface="Open Sans" pitchFamily="34" charset="-122"/>
-                <a:cs typeface="Open Sans" pitchFamily="34" charset="-120"/>
-              </a:rPr>
-              <a:t>Claude Code npm package</a:t>
-            </a:r>
-            <a:endParaRPr lang="en-US" sz="1000" dirty="0"/>
-          </a:p>
-        </p:txBody>
-      </p:sp>
-      <p:sp>
-        <p:nvSpPr>
-          <p:cNvPr id="15" name="Text 13"/>
-          <p:cNvSpPr/>
-          <p:nvPr/>
-        </p:nvSpPr>
-        <p:spPr>
-          <a:xfrm>
-            <a:off x="4846320" y="1051560"/>
-            <a:ext cx="3657600" cy="320040"/>
-          </a:xfrm>
-          <a:prstGeom prst="rect">
-            <a:avLst/>
-          </a:prstGeom>
-          <a:noFill/>
-          <a:ln/>
-        </p:spPr>
-        <p:txBody>
-          <a:bodyPr wrap="square" lIns="0" tIns="0" rIns="0" bIns="0" rtlCol="0" anchor="ctr"/>
-          <a:lstStyle/>
-          <a:p>
-            <a:pPr marL="0" indent="0">
-              <a:buNone/>
-            </a:pPr>
-            <a:r>
-              <a:rPr lang="en-US" sz="1400" b="1" dirty="0">
-                <a:solidFill>
-                  <a:srgbClr val="B8975C"/>
-                </a:solidFill>
-                <a:latin typeface="Open Sans" pitchFamily="34" charset="0"/>
-                <a:ea typeface="Open Sans" pitchFamily="34" charset="-122"/>
-                <a:cs typeface="Open Sans" pitchFamily="34" charset="-120"/>
-              </a:rPr>
-              <a:t>Claude Code Commands</a:t>
-            </a:r>
-            <a:endParaRPr lang="en-US" sz="1400" dirty="0"/>
-          </a:p>
-        </p:txBody>
-      </p:sp>
-      <p:sp>
-        <p:nvSpPr>
-          <p:cNvPr id="16" name="Text 14"/>
-          <p:cNvSpPr/>
-          <p:nvPr/>
-        </p:nvSpPr>
-        <p:spPr>
-          <a:xfrm>
-            <a:off x="4846320" y="1508760"/>
-            <a:ext cx="3200400" cy="182880"/>
-          </a:xfrm>
-          <a:prstGeom prst="rect">
-            <a:avLst/>
-          </a:prstGeom>
-          <a:noFill/>
-          <a:ln/>
-        </p:spPr>
-        <p:txBody>
-          <a:bodyPr wrap="square" lIns="0" tIns="0" rIns="0" bIns="0" rtlCol="0" anchor="ctr"/>
-          <a:lstStyle/>
-          <a:p>
-            <a:pPr marL="0" indent="0">
-              <a:buNone/>
-            </a:pPr>
-            <a:r>
-              <a:rPr lang="en-US" sz="1100" dirty="0">
-                <a:solidFill>
-                  <a:srgbClr val="B8975C"/>
-                </a:solidFill>
-                <a:latin typeface="Consolas" pitchFamily="34" charset="0"/>
-                <a:ea typeface="Consolas" pitchFamily="34" charset="-122"/>
-                <a:cs typeface="Consolas" pitchFamily="34" charset="-120"/>
-              </a:rPr>
-              <a:t>claude</a:t>
-            </a:r>
-            <a:endParaRPr lang="en-US" sz="1100" dirty="0"/>
-          </a:p>
-        </p:txBody>
-      </p:sp>
-      <p:sp>
-        <p:nvSpPr>
-          <p:cNvPr id="17" name="Text 15"/>
-          <p:cNvSpPr/>
-          <p:nvPr/>
-        </p:nvSpPr>
-        <p:spPr>
-          <a:xfrm>
-            <a:off x="4846320" y="1691640"/>
-            <a:ext cx="3657600" cy="182880"/>
-          </a:xfrm>
-          <a:prstGeom prst="rect">
-            <a:avLst/>
-          </a:prstGeom>
-          <a:noFill/>
-          <a:ln/>
-        </p:spPr>
-        <p:txBody>
-          <a:bodyPr wrap="square" lIns="0" tIns="0" rIns="0" bIns="0" rtlCol="0" anchor="ctr"/>
-          <a:lstStyle/>
-          <a:p>
-            <a:pPr marL="0" indent="0">
-              <a:buNone/>
-            </a:pPr>
-            <a:r>
-              <a:rPr lang="en-US" sz="1000" dirty="0">
-                <a:solidFill>
-                  <a:srgbClr val="8A9BAD"/>
-                </a:solidFill>
-                <a:latin typeface="Open Sans" pitchFamily="34" charset="0"/>
-                <a:ea typeface="Open Sans" pitchFamily="34" charset="-122"/>
-                <a:cs typeface="Open Sans" pitchFamily="34" charset="-120"/>
-              </a:rPr>
-              <a:t>Start Claude Code in current directory</a:t>
-            </a:r>
-            <a:endParaRPr lang="en-US" sz="1000" dirty="0"/>
-          </a:p>
-        </p:txBody>
-      </p:sp>
-      <p:sp>
-        <p:nvSpPr>
-          <p:cNvPr id="18" name="Text 16"/>
-          <p:cNvSpPr/>
-          <p:nvPr/>
-        </p:nvSpPr>
-        <p:spPr>
-          <a:xfrm>
-            <a:off x="4846320" y="1920240"/>
-            <a:ext cx="3200400" cy="182880"/>
-          </a:xfrm>
-          <a:prstGeom prst="rect">
-            <a:avLst/>
-          </a:prstGeom>
-          <a:noFill/>
-          <a:ln/>
-        </p:spPr>
-        <p:txBody>
-          <a:bodyPr wrap="square" lIns="0" tIns="0" rIns="0" bIns="0" rtlCol="0" anchor="ctr"/>
-          <a:lstStyle/>
-          <a:p>
-            <a:pPr marL="0" indent="0">
-              <a:buNone/>
-            </a:pPr>
-            <a:r>
-              <a:rPr lang="en-US" sz="1100" dirty="0">
-                <a:solidFill>
-                  <a:srgbClr val="B8975C"/>
-                </a:solidFill>
-                <a:latin typeface="Consolas" pitchFamily="34" charset="0"/>
-                <a:ea typeface="Consolas" pitchFamily="34" charset="-122"/>
-                <a:cs typeface="Consolas" pitchFamily="34" charset="-120"/>
-              </a:rPr>
-              <a:t>/help</a:t>
-            </a:r>
-            <a:endParaRPr lang="en-US" sz="1100" dirty="0"/>
-          </a:p>
-        </p:txBody>
-      </p:sp>
-      <p:sp>
-        <p:nvSpPr>
-          <p:cNvPr id="19" name="Text 17"/>
-          <p:cNvSpPr/>
-          <p:nvPr/>
-        </p:nvSpPr>
-        <p:spPr>
-          <a:xfrm>
-            <a:off x="4846320" y="2103120"/>
-            <a:ext cx="3657600" cy="182880"/>
-          </a:xfrm>
-          <a:prstGeom prst="rect">
-            <a:avLst/>
-          </a:prstGeom>
-          <a:noFill/>
-          <a:ln/>
-        </p:spPr>
-        <p:txBody>
-          <a:bodyPr wrap="square" lIns="0" tIns="0" rIns="0" bIns="0" rtlCol="0" anchor="ctr"/>
-          <a:lstStyle/>
-          <a:p>
-            <a:pPr marL="0" indent="0">
-              <a:buNone/>
-            </a:pPr>
-            <a:r>
-              <a:rPr lang="en-US" sz="1000" dirty="0">
-                <a:solidFill>
-                  <a:srgbClr val="8A9BAD"/>
-                </a:solidFill>
-                <a:latin typeface="Open Sans" pitchFamily="34" charset="0"/>
-                <a:ea typeface="Open Sans" pitchFamily="34" charset="-122"/>
-                <a:cs typeface="Open Sans" pitchFamily="34" charset="-120"/>
-              </a:rPr>
-              <a:t>Show available commands</a:t>
-            </a:r>
-            <a:endParaRPr lang="en-US" sz="1000" dirty="0"/>
-          </a:p>
-        </p:txBody>
-      </p:sp>
-      <p:sp>
-        <p:nvSpPr>
-          <p:cNvPr id="20" name="Text 18"/>
-          <p:cNvSpPr/>
-          <p:nvPr/>
-        </p:nvSpPr>
-        <p:spPr>
-          <a:xfrm>
-            <a:off x="4846320" y="2331720"/>
-            <a:ext cx="3200400" cy="182880"/>
-          </a:xfrm>
-          <a:prstGeom prst="rect">
-            <a:avLst/>
-          </a:prstGeom>
-          <a:noFill/>
-          <a:ln/>
-        </p:spPr>
-        <p:txBody>
-          <a:bodyPr wrap="square" lIns="0" tIns="0" rIns="0" bIns="0" rtlCol="0" anchor="ctr"/>
-          <a:lstStyle/>
-          <a:p>
-            <a:pPr marL="0" indent="0">
-              <a:buNone/>
-            </a:pPr>
-            <a:r>
-              <a:rPr lang="en-US" sz="1100" dirty="0">
-                <a:solidFill>
-                  <a:srgbClr val="B8975C"/>
-                </a:solidFill>
-                <a:latin typeface="Consolas" pitchFamily="34" charset="0"/>
-                <a:ea typeface="Consolas" pitchFamily="34" charset="-122"/>
-                <a:cs typeface="Consolas" pitchFamily="34" charset="-120"/>
-              </a:rPr>
-              <a:t>/clear</a:t>
-            </a:r>
-            <a:endParaRPr lang="en-US" sz="1100" dirty="0"/>
-          </a:p>
-        </p:txBody>
-      </p:sp>
-      <p:sp>
-        <p:nvSpPr>
-          <p:cNvPr id="21" name="Text 19"/>
-          <p:cNvSpPr/>
-          <p:nvPr/>
-        </p:nvSpPr>
-        <p:spPr>
-          <a:xfrm>
-            <a:off x="4846320" y="2514600"/>
-            <a:ext cx="3657600" cy="182880"/>
-          </a:xfrm>
-          <a:prstGeom prst="rect">
-            <a:avLst/>
-          </a:prstGeom>
-          <a:noFill/>
-          <a:ln/>
-        </p:spPr>
-        <p:txBody>
-          <a:bodyPr wrap="square" lIns="0" tIns="0" rIns="0" bIns="0" rtlCol="0" anchor="ctr"/>
-          <a:lstStyle/>
-          <a:p>
-            <a:pPr marL="0" indent="0">
-              <a:buNone/>
-            </a:pPr>
-            <a:r>
-              <a:rPr lang="en-US" sz="1000" dirty="0">
-                <a:solidFill>
-                  <a:srgbClr val="8A9BAD"/>
-                </a:solidFill>
-                <a:latin typeface="Open Sans" pitchFamily="34" charset="0"/>
-                <a:ea typeface="Open Sans" pitchFamily="34" charset="-122"/>
-                <a:cs typeface="Open Sans" pitchFamily="34" charset="-120"/>
-              </a:rPr>
-              <a:t>Clear conversation context</a:t>
-            </a:r>
-            <a:endParaRPr lang="en-US" sz="1000" dirty="0"/>
-          </a:p>
-        </p:txBody>
-      </p:sp>
-      <p:sp>
-        <p:nvSpPr>
-          <p:cNvPr id="22" name="Text 20"/>
-          <p:cNvSpPr/>
-          <p:nvPr/>
-        </p:nvSpPr>
-        <p:spPr>
-          <a:xfrm>
-            <a:off x="4846320" y="2743200"/>
-            <a:ext cx="3200400" cy="182880"/>
-          </a:xfrm>
-          <a:prstGeom prst="rect">
-            <a:avLst/>
-          </a:prstGeom>
-          <a:noFill/>
-          <a:ln/>
-        </p:spPr>
-        <p:txBody>
-          <a:bodyPr wrap="square" lIns="0" tIns="0" rIns="0" bIns="0" rtlCol="0" anchor="ctr"/>
-          <a:lstStyle/>
-          <a:p>
-            <a:pPr marL="0" indent="0">
-              <a:buNone/>
-            </a:pPr>
-            <a:r>
-              <a:rPr lang="en-US" sz="1100" dirty="0">
-                <a:solidFill>
-                  <a:srgbClr val="B8975C"/>
-                </a:solidFill>
-                <a:latin typeface="Consolas" pitchFamily="34" charset="0"/>
-                <a:ea typeface="Consolas" pitchFamily="34" charset="-122"/>
-                <a:cs typeface="Consolas" pitchFamily="34" charset="-120"/>
-              </a:rPr>
-              <a:t>Ctrl+C</a:t>
-            </a:r>
-            <a:endParaRPr lang="en-US" sz="1100" dirty="0"/>
-          </a:p>
-        </p:txBody>
-      </p:sp>
-      <p:sp>
-        <p:nvSpPr>
-          <p:cNvPr id="23" name="Text 21"/>
-          <p:cNvSpPr/>
-          <p:nvPr/>
-        </p:nvSpPr>
-        <p:spPr>
-          <a:xfrm>
-            <a:off x="4846320" y="2926080"/>
-            <a:ext cx="3657600" cy="182880"/>
-          </a:xfrm>
-          <a:prstGeom prst="rect">
-            <a:avLst/>
-          </a:prstGeom>
-          <a:noFill/>
-          <a:ln/>
-        </p:spPr>
-        <p:txBody>
-          <a:bodyPr wrap="square" lIns="0" tIns="0" rIns="0" bIns="0" rtlCol="0" anchor="ctr"/>
-          <a:lstStyle/>
-          <a:p>
-            <a:pPr marL="0" indent="0">
-              <a:buNone/>
-            </a:pPr>
-            <a:r>
-              <a:rPr lang="en-US" sz="1000" dirty="0">
-                <a:solidFill>
-                  <a:srgbClr val="8A9BAD"/>
-                </a:solidFill>
-                <a:latin typeface="Open Sans" pitchFamily="34" charset="0"/>
-                <a:ea typeface="Open Sans" pitchFamily="34" charset="-122"/>
-                <a:cs typeface="Open Sans" pitchFamily="34" charset="-120"/>
-              </a:rPr>
-              <a:t>Cancel current operation</a:t>
-            </a:r>
-            <a:endParaRPr lang="en-US" sz="1000" dirty="0"/>
-          </a:p>
-        </p:txBody>
-      </p:sp>
-      <p:sp>
-        <p:nvSpPr>
-          <p:cNvPr id="24" name="Text 22"/>
-          <p:cNvSpPr/>
-          <p:nvPr/>
-        </p:nvSpPr>
-        <p:spPr>
-          <a:xfrm>
-            <a:off x="4846320" y="3154680"/>
-            <a:ext cx="3200400" cy="182880"/>
-          </a:xfrm>
-          <a:prstGeom prst="rect">
-            <a:avLst/>
-          </a:prstGeom>
-          <a:noFill/>
-          <a:ln/>
-        </p:spPr>
-        <p:txBody>
-          <a:bodyPr wrap="square" lIns="0" tIns="0" rIns="0" bIns="0" rtlCol="0" anchor="ctr"/>
-          <a:lstStyle/>
-          <a:p>
-            <a:pPr marL="0" indent="0">
-              <a:buNone/>
-            </a:pPr>
-            <a:r>
-              <a:rPr lang="en-US" sz="1100" dirty="0">
-                <a:solidFill>
-                  <a:srgbClr val="B8975C"/>
-                </a:solidFill>
-                <a:latin typeface="Consolas" pitchFamily="34" charset="0"/>
-                <a:ea typeface="Consolas" pitchFamily="34" charset="-122"/>
-                <a:cs typeface="Consolas" pitchFamily="34" charset="-120"/>
-              </a:rPr>
-              <a:t>Type your request</a:t>
-            </a:r>
-            <a:endParaRPr lang="en-US" sz="1100" dirty="0"/>
-          </a:p>
-        </p:txBody>
-      </p:sp>
-      <p:sp>
-        <p:nvSpPr>
-          <p:cNvPr id="25" name="Text 23"/>
-          <p:cNvSpPr/>
-          <p:nvPr/>
-        </p:nvSpPr>
-        <p:spPr>
-          <a:xfrm>
-            <a:off x="4846320" y="3337560"/>
-            <a:ext cx="3657600" cy="182880"/>
-          </a:xfrm>
-          <a:prstGeom prst="rect">
-            <a:avLst/>
-          </a:prstGeom>
-          <a:noFill/>
-          <a:ln/>
-        </p:spPr>
-        <p:txBody>
-          <a:bodyPr wrap="square" lIns="0" tIns="0" rIns="0" bIns="0" rtlCol="0" anchor="ctr"/>
-          <a:lstStyle/>
-          <a:p>
-            <a:pPr marL="0" indent="0">
-              <a:buNone/>
-            </a:pPr>
-            <a:r>
-              <a:rPr lang="en-US" sz="1000" dirty="0">
-                <a:solidFill>
-                  <a:srgbClr val="8A9BAD"/>
-                </a:solidFill>
-                <a:latin typeface="Open Sans" pitchFamily="34" charset="0"/>
-                <a:ea typeface="Open Sans" pitchFamily="34" charset="-122"/>
-                <a:cs typeface="Open Sans" pitchFamily="34" charset="-120"/>
-              </a:rPr>
-              <a:t>Claude reads your files and responds</a:t>
-            </a:r>
-            <a:endParaRPr lang="en-US" sz="1000" dirty="0"/>
-          </a:p>
-        </p:txBody>
-      </p:sp>
-      <p:sp>
-        <p:nvSpPr>
-          <p:cNvPr id="26" name="Shape 24"/>
-          <p:cNvSpPr/>
-          <p:nvPr/>
-        </p:nvSpPr>
-        <p:spPr>
-          <a:xfrm>
-            <a:off x="731520" y="3931920"/>
-            <a:ext cx="1828800" cy="36576"/>
-          </a:xfrm>
-          <a:prstGeom prst="rect">
-            <a:avLst/>
-          </a:prstGeom>
-          <a:solidFill>
-            <a:srgbClr val="B8975C"/>
-          </a:solidFill>
-          <a:ln/>
-        </p:spPr>
-        <p:txBody>
-          <a:bodyPr/>
-          <a:lstStyle/>
-          <a:p>
-            <a:endParaRPr lang="en-US"/>
-          </a:p>
-        </p:txBody>
-      </p:sp>
-      <p:sp>
-        <p:nvSpPr>
-          <p:cNvPr id="27" name="Text 25"/>
-          <p:cNvSpPr/>
-          <p:nvPr/>
-        </p:nvSpPr>
-        <p:spPr>
-          <a:xfrm>
-            <a:off x="731520" y="4114800"/>
-            <a:ext cx="7680960" cy="274320"/>
-          </a:xfrm>
-          <a:prstGeom prst="rect">
-            <a:avLst/>
-          </a:prstGeom>
-          <a:noFill/>
-          <a:ln/>
-        </p:spPr>
-        <p:txBody>
-          <a:bodyPr wrap="square" lIns="0" tIns="0" rIns="0" bIns="0" rtlCol="0" anchor="ctr"/>
-          <a:lstStyle/>
-          <a:p>
-            <a:pPr marL="0" indent="0">
-              <a:buNone/>
-            </a:pPr>
-            <a:r>
-              <a:rPr lang="en-US" sz="1300" dirty="0">
-                <a:solidFill>
-                  <a:srgbClr val="8A9BAD"/>
-                </a:solidFill>
-                <a:latin typeface="Open Sans" pitchFamily="34" charset="0"/>
-                <a:ea typeface="Open Sans" pitchFamily="34" charset="-122"/>
-                <a:cs typeface="Open Sans" pitchFamily="34" charset="-120"/>
-              </a:rPr>
-              <a:t>Start with the web app. Graduate to Claude Code when you’re ready.</a:t>
-            </a:r>
-            <a:endParaRPr lang="en-US" sz="1300" dirty="0"/>
-          </a:p>
-        </p:txBody>
-      </p:sp>
-      <p:sp>
-        <p:nvSpPr>
-          <p:cNvPr id="28" name="Text 26"/>
-          <p:cNvSpPr/>
-          <p:nvPr/>
-        </p:nvSpPr>
-        <p:spPr>
-          <a:xfrm>
-            <a:off x="457200" y="4663440"/>
-            <a:ext cx="8229600" cy="320040"/>
-          </a:xfrm>
-          <a:prstGeom prst="rect">
-            <a:avLst/>
-          </a:prstGeom>
-          <a:noFill/>
-          <a:ln/>
-        </p:spPr>
-        <p:txBody>
-          <a:bodyPr wrap="square" lIns="0" tIns="0" rIns="0" bIns="0" rtlCol="0" anchor="ctr"/>
-          <a:lstStyle/>
-          <a:p>
-            <a:pPr marL="0" indent="0" algn="ctr">
-              <a:buNone/>
-            </a:pPr>
-            <a:r>
-              <a:rPr lang="en-US" sz="1000" dirty="0">
-                <a:solidFill>
-                  <a:srgbClr val="5A6B7A"/>
-                </a:solidFill>
-                <a:latin typeface="Open Sans" pitchFamily="34" charset="0"/>
-                <a:ea typeface="Open Sans" pitchFamily="34" charset="-122"/>
-                <a:cs typeface="Open Sans" pitchFamily="34" charset="-120"/>
-              </a:rPr>
-              <a:t>Shidler College of Business  |  University of Hawaiʻi at Mānoa  |  adamstau@hawaii.edu</a:t>
-            </a:r>
-            <a:endParaRPr lang="en-US" sz="1000" dirty="0"/>
-          </a:p>
-        </p:txBody>
-      </p:sp>
-    </p:spTree>
-  </p:cSld>
-  <p:clrMapOvr>
-    <a:masterClrMapping/>
-  </p:clrMapOvr>
-</p:sld>
-</file>
-
-<file path=ppt/slides/slide17.xml><?xml version="1.0" encoding="utf-8"?>
-<p:sld xmlns:a="http://schemas.openxmlformats.org/drawingml/2006/main" xmlns:r="http://schemas.openxmlformats.org/officeDocument/2006/relationships" xmlns:p="http://schemas.openxmlformats.org/presentationml/2006/main">
   <p:cSld name="Slide 14">
     <p:bg>
       <p:bgPr>
@@ -8068,7 +7006,7 @@
 </p:sld>
 </file>
 
-<file path=ppt/slides/slide18.xml><?xml version="1.0" encoding="utf-8"?>
+<file path=ppt/slides/slide17.xml><?xml version="1.0" encoding="utf-8"?>
 <p:sld xmlns:a="http://schemas.openxmlformats.org/drawingml/2006/main" xmlns:r="http://schemas.openxmlformats.org/officeDocument/2006/relationships" xmlns:p="http://schemas.openxmlformats.org/presentationml/2006/main">
   <p:cSld name="Slide 4">
     <p:bg>
@@ -8778,6 +7716,1068 @@
               <a:t>Both files live at docs/_branding/. The JSON is the source of truth; the HTML is for your visual review. Keep them in sync.</a:t>
             </a:r>
             <a:endParaRPr lang="en-US" sz="1100" dirty="0"/>
+          </a:p>
+        </p:txBody>
+      </p:sp>
+    </p:spTree>
+  </p:cSld>
+  <p:clrMapOvr>
+    <a:masterClrMapping/>
+  </p:clrMapOvr>
+</p:sld>
+</file>
+
+<file path=ppt/slides/slide18.xml><?xml version="1.0" encoding="utf-8"?>
+<p:sld xmlns:a="http://schemas.openxmlformats.org/drawingml/2006/main" xmlns:r="http://schemas.openxmlformats.org/officeDocument/2006/relationships" xmlns:p="http://schemas.openxmlformats.org/presentationml/2006/main">
+  <p:cSld name="Slide 15">
+    <p:bg>
+      <p:bgPr>
+        <a:solidFill>
+          <a:srgbClr val="1E2530"/>
+        </a:solidFill>
+        <a:effectLst/>
+      </p:bgPr>
+    </p:bg>
+    <p:spTree>
+      <p:nvGrpSpPr>
+        <p:cNvPr id="1" name=""/>
+        <p:cNvGrpSpPr/>
+        <p:nvPr/>
+      </p:nvGrpSpPr>
+      <p:grpSpPr>
+        <a:xfrm>
+          <a:off x="0" y="0"/>
+          <a:ext cx="0" cy="0"/>
+          <a:chOff x="0" y="0"/>
+          <a:chExt cx="0" cy="0"/>
+        </a:xfrm>
+      </p:grpSpPr>
+      <p:sp>
+        <p:nvSpPr>
+          <p:cNvPr id="2" name="Shape 0"/>
+          <p:cNvSpPr/>
+          <p:nvPr/>
+        </p:nvSpPr>
+        <p:spPr>
+          <a:xfrm>
+            <a:off x="0" y="0"/>
+            <a:ext cx="9144000" cy="36576"/>
+          </a:xfrm>
+          <a:prstGeom prst="rect">
+            <a:avLst/>
+          </a:prstGeom>
+          <a:solidFill>
+            <a:srgbClr val="B8975C"/>
+          </a:solidFill>
+          <a:ln/>
+        </p:spPr>
+        <p:txBody>
+          <a:bodyPr/>
+          <a:lstStyle/>
+          <a:p>
+            <a:endParaRPr lang="en-US"/>
+          </a:p>
+        </p:txBody>
+      </p:sp>
+      <p:sp>
+        <p:nvSpPr>
+          <p:cNvPr id="3" name="Text 1"/>
+          <p:cNvSpPr/>
+          <p:nvPr/>
+        </p:nvSpPr>
+        <p:spPr>
+          <a:xfrm>
+            <a:off x="731520" y="411480"/>
+            <a:ext cx="7680960" cy="457200"/>
+          </a:xfrm>
+          <a:prstGeom prst="rect">
+            <a:avLst/>
+          </a:prstGeom>
+          <a:noFill/>
+          <a:ln/>
+        </p:spPr>
+        <p:txBody>
+          <a:bodyPr wrap="square" lIns="0" tIns="0" rIns="0" bIns="0" rtlCol="0" anchor="ctr"/>
+          <a:lstStyle/>
+          <a:p>
+            <a:pPr marL="0" indent="0">
+              <a:buNone/>
+            </a:pPr>
+            <a:r>
+              <a:rPr lang="en-US" sz="2800" b="1" dirty="0">
+                <a:solidFill>
+                  <a:srgbClr val="FFFFFF"/>
+                </a:solidFill>
+                <a:latin typeface="Open Sans" pitchFamily="34" charset="0"/>
+                <a:ea typeface="Open Sans" pitchFamily="34" charset="-122"/>
+                <a:cs typeface="Open Sans" pitchFamily="34" charset="-120"/>
+              </a:rPr>
+              <a:t>Quick Reference</a:t>
+            </a:r>
+            <a:endParaRPr lang="en-US" sz="2800" dirty="0"/>
+          </a:p>
+        </p:txBody>
+      </p:sp>
+      <p:sp>
+        <p:nvSpPr>
+          <p:cNvPr id="4" name="Text 2"/>
+          <p:cNvSpPr/>
+          <p:nvPr/>
+        </p:nvSpPr>
+        <p:spPr>
+          <a:xfrm>
+            <a:off x="731520" y="1051560"/>
+            <a:ext cx="3657600" cy="320040"/>
+          </a:xfrm>
+          <a:prstGeom prst="rect">
+            <a:avLst/>
+          </a:prstGeom>
+          <a:noFill/>
+          <a:ln/>
+        </p:spPr>
+        <p:txBody>
+          <a:bodyPr wrap="square" lIns="0" tIns="0" rIns="0" bIns="0" rtlCol="0" anchor="ctr"/>
+          <a:lstStyle/>
+          <a:p>
+            <a:pPr marL="0" indent="0">
+              <a:buNone/>
+            </a:pPr>
+            <a:r>
+              <a:rPr lang="en-US" sz="1400" b="1" dirty="0">
+                <a:solidFill>
+                  <a:srgbClr val="B8975C"/>
+                </a:solidFill>
+                <a:latin typeface="Open Sans" pitchFamily="34" charset="0"/>
+                <a:ea typeface="Open Sans" pitchFamily="34" charset="-122"/>
+                <a:cs typeface="Open Sans" pitchFamily="34" charset="-120"/>
+              </a:rPr>
+              <a:t>Useful Links</a:t>
+            </a:r>
+            <a:endParaRPr lang="en-US" sz="1400" dirty="0"/>
+          </a:p>
+        </p:txBody>
+      </p:sp>
+      <p:sp>
+        <p:nvSpPr>
+          <p:cNvPr id="5" name="Text 3"/>
+          <p:cNvSpPr/>
+          <p:nvPr/>
+        </p:nvSpPr>
+        <p:spPr>
+          <a:xfrm>
+            <a:off x="731520" y="1508760"/>
+            <a:ext cx="2743200" cy="182880"/>
+          </a:xfrm>
+          <a:prstGeom prst="rect">
+            <a:avLst/>
+          </a:prstGeom>
+          <a:noFill/>
+          <a:ln/>
+        </p:spPr>
+        <p:txBody>
+          <a:bodyPr wrap="square" lIns="0" tIns="0" rIns="0" bIns="0" rtlCol="0" anchor="ctr"/>
+          <a:lstStyle/>
+          <a:p>
+            <a:pPr marL="0" indent="0">
+              <a:buNone/>
+            </a:pPr>
+            <a:r>
+              <a:rPr lang="en-US" sz="1100" dirty="0">
+                <a:solidFill>
+                  <a:srgbClr val="B8975C"/>
+                </a:solidFill>
+                <a:latin typeface="Consolas" pitchFamily="34" charset="0"/>
+                <a:ea typeface="Consolas" pitchFamily="34" charset="-122"/>
+                <a:cs typeface="Consolas" pitchFamily="34" charset="-120"/>
+              </a:rPr>
+              <a:t>claude.ai</a:t>
+            </a:r>
+            <a:endParaRPr lang="en-US" sz="1100" dirty="0"/>
+          </a:p>
+        </p:txBody>
+      </p:sp>
+      <p:sp>
+        <p:nvSpPr>
+          <p:cNvPr id="6" name="Text 4"/>
+          <p:cNvSpPr/>
+          <p:nvPr/>
+        </p:nvSpPr>
+        <p:spPr>
+          <a:xfrm>
+            <a:off x="731520" y="1691640"/>
+            <a:ext cx="3657600" cy="182880"/>
+          </a:xfrm>
+          <a:prstGeom prst="rect">
+            <a:avLst/>
+          </a:prstGeom>
+          <a:noFill/>
+          <a:ln/>
+        </p:spPr>
+        <p:txBody>
+          <a:bodyPr wrap="square" lIns="0" tIns="0" rIns="0" bIns="0" rtlCol="0" anchor="ctr"/>
+          <a:lstStyle/>
+          <a:p>
+            <a:pPr marL="0" indent="0">
+              <a:buNone/>
+            </a:pPr>
+            <a:r>
+              <a:rPr lang="en-US" sz="1000" dirty="0">
+                <a:solidFill>
+                  <a:srgbClr val="8A9BAD"/>
+                </a:solidFill>
+                <a:latin typeface="Open Sans" pitchFamily="34" charset="0"/>
+                <a:ea typeface="Open Sans" pitchFamily="34" charset="-122"/>
+                <a:cs typeface="Open Sans" pitchFamily="34" charset="-120"/>
+              </a:rPr>
+              <a:t>Web interface (free sign-up)</a:t>
+            </a:r>
+            <a:endParaRPr lang="en-US" sz="1000" dirty="0"/>
+          </a:p>
+        </p:txBody>
+      </p:sp>
+      <p:sp>
+        <p:nvSpPr>
+          <p:cNvPr id="7" name="Text 5"/>
+          <p:cNvSpPr/>
+          <p:nvPr/>
+        </p:nvSpPr>
+        <p:spPr>
+          <a:xfrm>
+            <a:off x="731520" y="1920240"/>
+            <a:ext cx="2743200" cy="182880"/>
+          </a:xfrm>
+          <a:prstGeom prst="rect">
+            <a:avLst/>
+          </a:prstGeom>
+          <a:noFill/>
+          <a:ln/>
+        </p:spPr>
+        <p:txBody>
+          <a:bodyPr wrap="square" lIns="0" tIns="0" rIns="0" bIns="0" rtlCol="0" anchor="ctr"/>
+          <a:lstStyle/>
+          <a:p>
+            <a:pPr marL="0" indent="0">
+              <a:buNone/>
+            </a:pPr>
+            <a:r>
+              <a:rPr lang="en-US" sz="1100" dirty="0">
+                <a:solidFill>
+                  <a:srgbClr val="B8975C"/>
+                </a:solidFill>
+                <a:latin typeface="Consolas" pitchFamily="34" charset="0"/>
+                <a:ea typeface="Consolas" pitchFamily="34" charset="-122"/>
+                <a:cs typeface="Consolas" pitchFamily="34" charset="-120"/>
+              </a:rPr>
+              <a:t>claude.ai/download</a:t>
+            </a:r>
+            <a:endParaRPr lang="en-US" sz="1100" dirty="0"/>
+          </a:p>
+        </p:txBody>
+      </p:sp>
+      <p:sp>
+        <p:nvSpPr>
+          <p:cNvPr id="8" name="Text 6"/>
+          <p:cNvSpPr/>
+          <p:nvPr/>
+        </p:nvSpPr>
+        <p:spPr>
+          <a:xfrm>
+            <a:off x="731520" y="2103120"/>
+            <a:ext cx="3657600" cy="182880"/>
+          </a:xfrm>
+          <a:prstGeom prst="rect">
+            <a:avLst/>
+          </a:prstGeom>
+          <a:noFill/>
+          <a:ln/>
+        </p:spPr>
+        <p:txBody>
+          <a:bodyPr wrap="square" lIns="0" tIns="0" rIns="0" bIns="0" rtlCol="0" anchor="ctr"/>
+          <a:lstStyle/>
+          <a:p>
+            <a:pPr marL="0" indent="0">
+              <a:buNone/>
+            </a:pPr>
+            <a:r>
+              <a:rPr lang="en-US" sz="1000" dirty="0">
+                <a:solidFill>
+                  <a:srgbClr val="8A9BAD"/>
+                </a:solidFill>
+                <a:latin typeface="Open Sans" pitchFamily="34" charset="0"/>
+                <a:ea typeface="Open Sans" pitchFamily="34" charset="-122"/>
+                <a:cs typeface="Open Sans" pitchFamily="34" charset="-120"/>
+              </a:rPr>
+              <a:t>Desktop app (Mac &amp; Windows)</a:t>
+            </a:r>
+            <a:endParaRPr lang="en-US" sz="1000" dirty="0"/>
+          </a:p>
+        </p:txBody>
+      </p:sp>
+      <p:sp>
+        <p:nvSpPr>
+          <p:cNvPr id="9" name="Text 7"/>
+          <p:cNvSpPr/>
+          <p:nvPr/>
+        </p:nvSpPr>
+        <p:spPr>
+          <a:xfrm>
+            <a:off x="731520" y="2331720"/>
+            <a:ext cx="2743200" cy="182880"/>
+          </a:xfrm>
+          <a:prstGeom prst="rect">
+            <a:avLst/>
+          </a:prstGeom>
+          <a:noFill/>
+          <a:ln/>
+        </p:spPr>
+        <p:txBody>
+          <a:bodyPr wrap="square" lIns="0" tIns="0" rIns="0" bIns="0" rtlCol="0" anchor="ctr"/>
+          <a:lstStyle/>
+          <a:p>
+            <a:pPr marL="0" indent="0">
+              <a:buNone/>
+            </a:pPr>
+            <a:r>
+              <a:rPr lang="en-US" sz="1100" dirty="0">
+                <a:solidFill>
+                  <a:srgbClr val="B8975C"/>
+                </a:solidFill>
+                <a:latin typeface="Consolas" pitchFamily="34" charset="0"/>
+                <a:ea typeface="Consolas" pitchFamily="34" charset="-122"/>
+                <a:cs typeface="Consolas" pitchFamily="34" charset="-120"/>
+              </a:rPr>
+              <a:t>docs.anthropic.com</a:t>
+            </a:r>
+            <a:endParaRPr lang="en-US" sz="1100" dirty="0"/>
+          </a:p>
+        </p:txBody>
+      </p:sp>
+      <p:sp>
+        <p:nvSpPr>
+          <p:cNvPr id="10" name="Text 8"/>
+          <p:cNvSpPr/>
+          <p:nvPr/>
+        </p:nvSpPr>
+        <p:spPr>
+          <a:xfrm>
+            <a:off x="731520" y="2514600"/>
+            <a:ext cx="3657600" cy="182880"/>
+          </a:xfrm>
+          <a:prstGeom prst="rect">
+            <a:avLst/>
+          </a:prstGeom>
+          <a:noFill/>
+          <a:ln/>
+        </p:spPr>
+        <p:txBody>
+          <a:bodyPr wrap="square" lIns="0" tIns="0" rIns="0" bIns="0" rtlCol="0" anchor="ctr"/>
+          <a:lstStyle/>
+          <a:p>
+            <a:pPr marL="0" indent="0">
+              <a:buNone/>
+            </a:pPr>
+            <a:r>
+              <a:rPr lang="en-US" sz="1000" dirty="0">
+                <a:solidFill>
+                  <a:srgbClr val="8A9BAD"/>
+                </a:solidFill>
+                <a:latin typeface="Open Sans" pitchFamily="34" charset="0"/>
+                <a:ea typeface="Open Sans" pitchFamily="34" charset="-122"/>
+                <a:cs typeface="Open Sans" pitchFamily="34" charset="-120"/>
+              </a:rPr>
+              <a:t>Official Claude documentation</a:t>
+            </a:r>
+            <a:endParaRPr lang="en-US" sz="1000" dirty="0"/>
+          </a:p>
+        </p:txBody>
+      </p:sp>
+      <p:sp>
+        <p:nvSpPr>
+          <p:cNvPr id="11" name="Text 9"/>
+          <p:cNvSpPr/>
+          <p:nvPr/>
+        </p:nvSpPr>
+        <p:spPr>
+          <a:xfrm>
+            <a:off x="731520" y="2743200"/>
+            <a:ext cx="2743200" cy="182880"/>
+          </a:xfrm>
+          <a:prstGeom prst="rect">
+            <a:avLst/>
+          </a:prstGeom>
+          <a:noFill/>
+          <a:ln/>
+        </p:spPr>
+        <p:txBody>
+          <a:bodyPr wrap="square" lIns="0" tIns="0" rIns="0" bIns="0" rtlCol="0" anchor="ctr"/>
+          <a:lstStyle/>
+          <a:p>
+            <a:pPr marL="0" indent="0">
+              <a:buNone/>
+            </a:pPr>
+            <a:r>
+              <a:rPr lang="en-US" sz="1100" dirty="0">
+                <a:solidFill>
+                  <a:srgbClr val="B8975C"/>
+                </a:solidFill>
+                <a:latin typeface="Consolas" pitchFamily="34" charset="0"/>
+                <a:ea typeface="Consolas" pitchFamily="34" charset="-122"/>
+                <a:cs typeface="Consolas" pitchFamily="34" charset="-120"/>
+              </a:rPr>
+              <a:t>claude.ai/code</a:t>
+            </a:r>
+            <a:endParaRPr lang="en-US" sz="1100" dirty="0"/>
+          </a:p>
+        </p:txBody>
+      </p:sp>
+      <p:sp>
+        <p:nvSpPr>
+          <p:cNvPr id="12" name="Text 10"/>
+          <p:cNvSpPr/>
+          <p:nvPr/>
+        </p:nvSpPr>
+        <p:spPr>
+          <a:xfrm>
+            <a:off x="731520" y="2926080"/>
+            <a:ext cx="3657600" cy="182880"/>
+          </a:xfrm>
+          <a:prstGeom prst="rect">
+            <a:avLst/>
+          </a:prstGeom>
+          <a:noFill/>
+          <a:ln/>
+        </p:spPr>
+        <p:txBody>
+          <a:bodyPr wrap="square" lIns="0" tIns="0" rIns="0" bIns="0" rtlCol="0" anchor="ctr"/>
+          <a:lstStyle/>
+          <a:p>
+            <a:pPr marL="0" indent="0">
+              <a:buNone/>
+            </a:pPr>
+            <a:r>
+              <a:rPr lang="en-US" sz="1000" dirty="0">
+                <a:solidFill>
+                  <a:srgbClr val="8A9BAD"/>
+                </a:solidFill>
+                <a:latin typeface="Open Sans" pitchFamily="34" charset="0"/>
+                <a:ea typeface="Open Sans" pitchFamily="34" charset="-122"/>
+                <a:cs typeface="Open Sans" pitchFamily="34" charset="-120"/>
+              </a:rPr>
+              <a:t>Claude Code (CLI tool)</a:t>
+            </a:r>
+            <a:endParaRPr lang="en-US" sz="1000" dirty="0"/>
+          </a:p>
+        </p:txBody>
+      </p:sp>
+      <p:sp>
+        <p:nvSpPr>
+          <p:cNvPr id="13" name="Text 11"/>
+          <p:cNvSpPr/>
+          <p:nvPr/>
+        </p:nvSpPr>
+        <p:spPr>
+          <a:xfrm>
+            <a:off x="731520" y="3154680"/>
+            <a:ext cx="2743200" cy="182880"/>
+          </a:xfrm>
+          <a:prstGeom prst="rect">
+            <a:avLst/>
+          </a:prstGeom>
+          <a:noFill/>
+          <a:ln/>
+        </p:spPr>
+        <p:txBody>
+          <a:bodyPr wrap="square" lIns="0" tIns="0" rIns="0" bIns="0" rtlCol="0" anchor="ctr"/>
+          <a:lstStyle/>
+          <a:p>
+            <a:pPr marL="0" indent="0">
+              <a:buNone/>
+            </a:pPr>
+            <a:r>
+              <a:rPr lang="en-US" sz="1100" dirty="0">
+                <a:solidFill>
+                  <a:srgbClr val="B8975C"/>
+                </a:solidFill>
+                <a:latin typeface="Consolas" pitchFamily="34" charset="0"/>
+                <a:ea typeface="Consolas" pitchFamily="34" charset="-122"/>
+                <a:cs typeface="Consolas" pitchFamily="34" charset="-120"/>
+              </a:rPr>
+              <a:t>npmjs.com/package/@anthropic-ai/claude-code</a:t>
+            </a:r>
+            <a:endParaRPr lang="en-US" sz="1100" dirty="0"/>
+          </a:p>
+        </p:txBody>
+      </p:sp>
+      <p:sp>
+        <p:nvSpPr>
+          <p:cNvPr id="14" name="Text 12"/>
+          <p:cNvSpPr/>
+          <p:nvPr/>
+        </p:nvSpPr>
+        <p:spPr>
+          <a:xfrm>
+            <a:off x="731520" y="3337560"/>
+            <a:ext cx="3657600" cy="182880"/>
+          </a:xfrm>
+          <a:prstGeom prst="rect">
+            <a:avLst/>
+          </a:prstGeom>
+          <a:noFill/>
+          <a:ln/>
+        </p:spPr>
+        <p:txBody>
+          <a:bodyPr wrap="square" lIns="0" tIns="0" rIns="0" bIns="0" rtlCol="0" anchor="ctr"/>
+          <a:lstStyle/>
+          <a:p>
+            <a:pPr marL="0" indent="0">
+              <a:buNone/>
+            </a:pPr>
+            <a:r>
+              <a:rPr lang="en-US" sz="1000" dirty="0">
+                <a:solidFill>
+                  <a:srgbClr val="8A9BAD"/>
+                </a:solidFill>
+                <a:latin typeface="Open Sans" pitchFamily="34" charset="0"/>
+                <a:ea typeface="Open Sans" pitchFamily="34" charset="-122"/>
+                <a:cs typeface="Open Sans" pitchFamily="34" charset="-120"/>
+              </a:rPr>
+              <a:t>Claude Code npm package</a:t>
+            </a:r>
+            <a:endParaRPr lang="en-US" sz="1000" dirty="0"/>
+          </a:p>
+        </p:txBody>
+      </p:sp>
+      <p:sp>
+        <p:nvSpPr>
+          <p:cNvPr id="15" name="Text 13"/>
+          <p:cNvSpPr/>
+          <p:nvPr/>
+        </p:nvSpPr>
+        <p:spPr>
+          <a:xfrm>
+            <a:off x="4846320" y="1051560"/>
+            <a:ext cx="3657600" cy="320040"/>
+          </a:xfrm>
+          <a:prstGeom prst="rect">
+            <a:avLst/>
+          </a:prstGeom>
+          <a:noFill/>
+          <a:ln/>
+        </p:spPr>
+        <p:txBody>
+          <a:bodyPr wrap="square" lIns="0" tIns="0" rIns="0" bIns="0" rtlCol="0" anchor="ctr"/>
+          <a:lstStyle/>
+          <a:p>
+            <a:pPr marL="0" indent="0">
+              <a:buNone/>
+            </a:pPr>
+            <a:r>
+              <a:rPr lang="en-US" sz="1400" b="1" dirty="0">
+                <a:solidFill>
+                  <a:srgbClr val="B8975C"/>
+                </a:solidFill>
+                <a:latin typeface="Open Sans" pitchFamily="34" charset="0"/>
+                <a:ea typeface="Open Sans" pitchFamily="34" charset="-122"/>
+                <a:cs typeface="Open Sans" pitchFamily="34" charset="-120"/>
+              </a:rPr>
+              <a:t>Claude Code Commands</a:t>
+            </a:r>
+            <a:endParaRPr lang="en-US" sz="1400" dirty="0"/>
+          </a:p>
+        </p:txBody>
+      </p:sp>
+      <p:sp>
+        <p:nvSpPr>
+          <p:cNvPr id="16" name="Text 14"/>
+          <p:cNvSpPr/>
+          <p:nvPr/>
+        </p:nvSpPr>
+        <p:spPr>
+          <a:xfrm>
+            <a:off x="4846320" y="1508760"/>
+            <a:ext cx="3200400" cy="182880"/>
+          </a:xfrm>
+          <a:prstGeom prst="rect">
+            <a:avLst/>
+          </a:prstGeom>
+          <a:noFill/>
+          <a:ln/>
+        </p:spPr>
+        <p:txBody>
+          <a:bodyPr wrap="square" lIns="0" tIns="0" rIns="0" bIns="0" rtlCol="0" anchor="ctr"/>
+          <a:lstStyle/>
+          <a:p>
+            <a:pPr marL="0" indent="0">
+              <a:buNone/>
+            </a:pPr>
+            <a:r>
+              <a:rPr lang="en-US" sz="1100" dirty="0">
+                <a:solidFill>
+                  <a:srgbClr val="B8975C"/>
+                </a:solidFill>
+                <a:latin typeface="Consolas" pitchFamily="34" charset="0"/>
+                <a:ea typeface="Consolas" pitchFamily="34" charset="-122"/>
+                <a:cs typeface="Consolas" pitchFamily="34" charset="-120"/>
+              </a:rPr>
+              <a:t>claude</a:t>
+            </a:r>
+            <a:endParaRPr lang="en-US" sz="1100" dirty="0"/>
+          </a:p>
+        </p:txBody>
+      </p:sp>
+      <p:sp>
+        <p:nvSpPr>
+          <p:cNvPr id="17" name="Text 15"/>
+          <p:cNvSpPr/>
+          <p:nvPr/>
+        </p:nvSpPr>
+        <p:spPr>
+          <a:xfrm>
+            <a:off x="4846320" y="1691640"/>
+            <a:ext cx="3657600" cy="182880"/>
+          </a:xfrm>
+          <a:prstGeom prst="rect">
+            <a:avLst/>
+          </a:prstGeom>
+          <a:noFill/>
+          <a:ln/>
+        </p:spPr>
+        <p:txBody>
+          <a:bodyPr wrap="square" lIns="0" tIns="0" rIns="0" bIns="0" rtlCol="0" anchor="ctr"/>
+          <a:lstStyle/>
+          <a:p>
+            <a:pPr marL="0" indent="0">
+              <a:buNone/>
+            </a:pPr>
+            <a:r>
+              <a:rPr lang="en-US" sz="1000" dirty="0">
+                <a:solidFill>
+                  <a:srgbClr val="8A9BAD"/>
+                </a:solidFill>
+                <a:latin typeface="Open Sans" pitchFamily="34" charset="0"/>
+                <a:ea typeface="Open Sans" pitchFamily="34" charset="-122"/>
+                <a:cs typeface="Open Sans" pitchFamily="34" charset="-120"/>
+              </a:rPr>
+              <a:t>Start Claude Code in current directory</a:t>
+            </a:r>
+            <a:endParaRPr lang="en-US" sz="1000" dirty="0"/>
+          </a:p>
+        </p:txBody>
+      </p:sp>
+      <p:sp>
+        <p:nvSpPr>
+          <p:cNvPr id="18" name="Text 16"/>
+          <p:cNvSpPr/>
+          <p:nvPr/>
+        </p:nvSpPr>
+        <p:spPr>
+          <a:xfrm>
+            <a:off x="4846320" y="1920240"/>
+            <a:ext cx="3200400" cy="182880"/>
+          </a:xfrm>
+          <a:prstGeom prst="rect">
+            <a:avLst/>
+          </a:prstGeom>
+          <a:noFill/>
+          <a:ln/>
+        </p:spPr>
+        <p:txBody>
+          <a:bodyPr wrap="square" lIns="0" tIns="0" rIns="0" bIns="0" rtlCol="0" anchor="ctr"/>
+          <a:lstStyle/>
+          <a:p>
+            <a:pPr marL="0" indent="0">
+              <a:buNone/>
+            </a:pPr>
+            <a:r>
+              <a:rPr lang="en-US" sz="1100" dirty="0">
+                <a:solidFill>
+                  <a:srgbClr val="B8975C"/>
+                </a:solidFill>
+                <a:latin typeface="Consolas" pitchFamily="34" charset="0"/>
+                <a:ea typeface="Consolas" pitchFamily="34" charset="-122"/>
+                <a:cs typeface="Consolas" pitchFamily="34" charset="-120"/>
+              </a:rPr>
+              <a:t>/help</a:t>
+            </a:r>
+            <a:endParaRPr lang="en-US" sz="1100" dirty="0"/>
+          </a:p>
+        </p:txBody>
+      </p:sp>
+      <p:sp>
+        <p:nvSpPr>
+          <p:cNvPr id="19" name="Text 17"/>
+          <p:cNvSpPr/>
+          <p:nvPr/>
+        </p:nvSpPr>
+        <p:spPr>
+          <a:xfrm>
+            <a:off x="4846320" y="2103120"/>
+            <a:ext cx="3657600" cy="182880"/>
+          </a:xfrm>
+          <a:prstGeom prst="rect">
+            <a:avLst/>
+          </a:prstGeom>
+          <a:noFill/>
+          <a:ln/>
+        </p:spPr>
+        <p:txBody>
+          <a:bodyPr wrap="square" lIns="0" tIns="0" rIns="0" bIns="0" rtlCol="0" anchor="ctr"/>
+          <a:lstStyle/>
+          <a:p>
+            <a:pPr marL="0" indent="0">
+              <a:buNone/>
+            </a:pPr>
+            <a:r>
+              <a:rPr lang="en-US" sz="1000" dirty="0">
+                <a:solidFill>
+                  <a:srgbClr val="8A9BAD"/>
+                </a:solidFill>
+                <a:latin typeface="Open Sans" pitchFamily="34" charset="0"/>
+                <a:ea typeface="Open Sans" pitchFamily="34" charset="-122"/>
+                <a:cs typeface="Open Sans" pitchFamily="34" charset="-120"/>
+              </a:rPr>
+              <a:t>Show available commands</a:t>
+            </a:r>
+            <a:endParaRPr lang="en-US" sz="1000" dirty="0"/>
+          </a:p>
+        </p:txBody>
+      </p:sp>
+      <p:sp>
+        <p:nvSpPr>
+          <p:cNvPr id="20" name="Text 18"/>
+          <p:cNvSpPr/>
+          <p:nvPr/>
+        </p:nvSpPr>
+        <p:spPr>
+          <a:xfrm>
+            <a:off x="4846320" y="2331720"/>
+            <a:ext cx="3200400" cy="182880"/>
+          </a:xfrm>
+          <a:prstGeom prst="rect">
+            <a:avLst/>
+          </a:prstGeom>
+          <a:noFill/>
+          <a:ln/>
+        </p:spPr>
+        <p:txBody>
+          <a:bodyPr wrap="square" lIns="0" tIns="0" rIns="0" bIns="0" rtlCol="0" anchor="ctr"/>
+          <a:lstStyle/>
+          <a:p>
+            <a:pPr marL="0" indent="0">
+              <a:buNone/>
+            </a:pPr>
+            <a:r>
+              <a:rPr lang="en-US" sz="1100" dirty="0">
+                <a:solidFill>
+                  <a:srgbClr val="B8975C"/>
+                </a:solidFill>
+                <a:latin typeface="Consolas" pitchFamily="34" charset="0"/>
+                <a:ea typeface="Consolas" pitchFamily="34" charset="-122"/>
+                <a:cs typeface="Consolas" pitchFamily="34" charset="-120"/>
+              </a:rPr>
+              <a:t>/clear</a:t>
+            </a:r>
+            <a:endParaRPr lang="en-US" sz="1100" dirty="0"/>
+          </a:p>
+        </p:txBody>
+      </p:sp>
+      <p:sp>
+        <p:nvSpPr>
+          <p:cNvPr id="21" name="Text 19"/>
+          <p:cNvSpPr/>
+          <p:nvPr/>
+        </p:nvSpPr>
+        <p:spPr>
+          <a:xfrm>
+            <a:off x="4846320" y="2514600"/>
+            <a:ext cx="3657600" cy="182880"/>
+          </a:xfrm>
+          <a:prstGeom prst="rect">
+            <a:avLst/>
+          </a:prstGeom>
+          <a:noFill/>
+          <a:ln/>
+        </p:spPr>
+        <p:txBody>
+          <a:bodyPr wrap="square" lIns="0" tIns="0" rIns="0" bIns="0" rtlCol="0" anchor="ctr"/>
+          <a:lstStyle/>
+          <a:p>
+            <a:pPr marL="0" indent="0">
+              <a:buNone/>
+            </a:pPr>
+            <a:r>
+              <a:rPr lang="en-US" sz="1000" dirty="0">
+                <a:solidFill>
+                  <a:srgbClr val="8A9BAD"/>
+                </a:solidFill>
+                <a:latin typeface="Open Sans" pitchFamily="34" charset="0"/>
+                <a:ea typeface="Open Sans" pitchFamily="34" charset="-122"/>
+                <a:cs typeface="Open Sans" pitchFamily="34" charset="-120"/>
+              </a:rPr>
+              <a:t>Clear conversation context</a:t>
+            </a:r>
+            <a:endParaRPr lang="en-US" sz="1000" dirty="0"/>
+          </a:p>
+        </p:txBody>
+      </p:sp>
+      <p:sp>
+        <p:nvSpPr>
+          <p:cNvPr id="22" name="Text 20"/>
+          <p:cNvSpPr/>
+          <p:nvPr/>
+        </p:nvSpPr>
+        <p:spPr>
+          <a:xfrm>
+            <a:off x="4846320" y="2743200"/>
+            <a:ext cx="3200400" cy="182880"/>
+          </a:xfrm>
+          <a:prstGeom prst="rect">
+            <a:avLst/>
+          </a:prstGeom>
+          <a:noFill/>
+          <a:ln/>
+        </p:spPr>
+        <p:txBody>
+          <a:bodyPr wrap="square" lIns="0" tIns="0" rIns="0" bIns="0" rtlCol="0" anchor="ctr"/>
+          <a:lstStyle/>
+          <a:p>
+            <a:pPr marL="0" indent="0">
+              <a:buNone/>
+            </a:pPr>
+            <a:r>
+              <a:rPr lang="en-US" sz="1100" dirty="0">
+                <a:solidFill>
+                  <a:srgbClr val="B8975C"/>
+                </a:solidFill>
+                <a:latin typeface="Consolas" pitchFamily="34" charset="0"/>
+                <a:ea typeface="Consolas" pitchFamily="34" charset="-122"/>
+                <a:cs typeface="Consolas" pitchFamily="34" charset="-120"/>
+              </a:rPr>
+              <a:t>Ctrl+C</a:t>
+            </a:r>
+            <a:endParaRPr lang="en-US" sz="1100" dirty="0"/>
+          </a:p>
+        </p:txBody>
+      </p:sp>
+      <p:sp>
+        <p:nvSpPr>
+          <p:cNvPr id="23" name="Text 21"/>
+          <p:cNvSpPr/>
+          <p:nvPr/>
+        </p:nvSpPr>
+        <p:spPr>
+          <a:xfrm>
+            <a:off x="4846320" y="2926080"/>
+            <a:ext cx="3657600" cy="182880"/>
+          </a:xfrm>
+          <a:prstGeom prst="rect">
+            <a:avLst/>
+          </a:prstGeom>
+          <a:noFill/>
+          <a:ln/>
+        </p:spPr>
+        <p:txBody>
+          <a:bodyPr wrap="square" lIns="0" tIns="0" rIns="0" bIns="0" rtlCol="0" anchor="ctr"/>
+          <a:lstStyle/>
+          <a:p>
+            <a:pPr marL="0" indent="0">
+              <a:buNone/>
+            </a:pPr>
+            <a:r>
+              <a:rPr lang="en-US" sz="1000" dirty="0">
+                <a:solidFill>
+                  <a:srgbClr val="8A9BAD"/>
+                </a:solidFill>
+                <a:latin typeface="Open Sans" pitchFamily="34" charset="0"/>
+                <a:ea typeface="Open Sans" pitchFamily="34" charset="-122"/>
+                <a:cs typeface="Open Sans" pitchFamily="34" charset="-120"/>
+              </a:rPr>
+              <a:t>Cancel current operation</a:t>
+            </a:r>
+            <a:endParaRPr lang="en-US" sz="1000" dirty="0"/>
+          </a:p>
+        </p:txBody>
+      </p:sp>
+      <p:sp>
+        <p:nvSpPr>
+          <p:cNvPr id="24" name="Text 22"/>
+          <p:cNvSpPr/>
+          <p:nvPr/>
+        </p:nvSpPr>
+        <p:spPr>
+          <a:xfrm>
+            <a:off x="4846320" y="3154680"/>
+            <a:ext cx="3200400" cy="182880"/>
+          </a:xfrm>
+          <a:prstGeom prst="rect">
+            <a:avLst/>
+          </a:prstGeom>
+          <a:noFill/>
+          <a:ln/>
+        </p:spPr>
+        <p:txBody>
+          <a:bodyPr wrap="square" lIns="0" tIns="0" rIns="0" bIns="0" rtlCol="0" anchor="ctr"/>
+          <a:lstStyle/>
+          <a:p>
+            <a:pPr marL="0" indent="0">
+              <a:buNone/>
+            </a:pPr>
+            <a:r>
+              <a:rPr lang="en-US" sz="1100" dirty="0">
+                <a:solidFill>
+                  <a:srgbClr val="B8975C"/>
+                </a:solidFill>
+                <a:latin typeface="Consolas" pitchFamily="34" charset="0"/>
+                <a:ea typeface="Consolas" pitchFamily="34" charset="-122"/>
+                <a:cs typeface="Consolas" pitchFamily="34" charset="-120"/>
+              </a:rPr>
+              <a:t>Type your request</a:t>
+            </a:r>
+            <a:endParaRPr lang="en-US" sz="1100" dirty="0"/>
+          </a:p>
+        </p:txBody>
+      </p:sp>
+      <p:sp>
+        <p:nvSpPr>
+          <p:cNvPr id="25" name="Text 23"/>
+          <p:cNvSpPr/>
+          <p:nvPr/>
+        </p:nvSpPr>
+        <p:spPr>
+          <a:xfrm>
+            <a:off x="4846320" y="3337560"/>
+            <a:ext cx="3657600" cy="182880"/>
+          </a:xfrm>
+          <a:prstGeom prst="rect">
+            <a:avLst/>
+          </a:prstGeom>
+          <a:noFill/>
+          <a:ln/>
+        </p:spPr>
+        <p:txBody>
+          <a:bodyPr wrap="square" lIns="0" tIns="0" rIns="0" bIns="0" rtlCol="0" anchor="ctr"/>
+          <a:lstStyle/>
+          <a:p>
+            <a:pPr marL="0" indent="0">
+              <a:buNone/>
+            </a:pPr>
+            <a:r>
+              <a:rPr lang="en-US" sz="1000" dirty="0">
+                <a:solidFill>
+                  <a:srgbClr val="8A9BAD"/>
+                </a:solidFill>
+                <a:latin typeface="Open Sans" pitchFamily="34" charset="0"/>
+                <a:ea typeface="Open Sans" pitchFamily="34" charset="-122"/>
+                <a:cs typeface="Open Sans" pitchFamily="34" charset="-120"/>
+              </a:rPr>
+              <a:t>Claude reads your files and responds</a:t>
+            </a:r>
+            <a:endParaRPr lang="en-US" sz="1000" dirty="0"/>
+          </a:p>
+        </p:txBody>
+      </p:sp>
+      <p:sp>
+        <p:nvSpPr>
+          <p:cNvPr id="26" name="Shape 24"/>
+          <p:cNvSpPr/>
+          <p:nvPr/>
+        </p:nvSpPr>
+        <p:spPr>
+          <a:xfrm>
+            <a:off x="731520" y="3931920"/>
+            <a:ext cx="1828800" cy="36576"/>
+          </a:xfrm>
+          <a:prstGeom prst="rect">
+            <a:avLst/>
+          </a:prstGeom>
+          <a:solidFill>
+            <a:srgbClr val="B8975C"/>
+          </a:solidFill>
+          <a:ln/>
+        </p:spPr>
+        <p:txBody>
+          <a:bodyPr/>
+          <a:lstStyle/>
+          <a:p>
+            <a:endParaRPr lang="en-US"/>
+          </a:p>
+        </p:txBody>
+      </p:sp>
+      <p:sp>
+        <p:nvSpPr>
+          <p:cNvPr id="27" name="Text 25"/>
+          <p:cNvSpPr/>
+          <p:nvPr/>
+        </p:nvSpPr>
+        <p:spPr>
+          <a:xfrm>
+            <a:off x="731520" y="4114800"/>
+            <a:ext cx="7680960" cy="274320"/>
+          </a:xfrm>
+          <a:prstGeom prst="rect">
+            <a:avLst/>
+          </a:prstGeom>
+          <a:noFill/>
+          <a:ln/>
+        </p:spPr>
+        <p:txBody>
+          <a:bodyPr wrap="square" lIns="0" tIns="0" rIns="0" bIns="0" rtlCol="0" anchor="ctr"/>
+          <a:lstStyle/>
+          <a:p>
+            <a:pPr marL="0" indent="0">
+              <a:buNone/>
+            </a:pPr>
+            <a:r>
+              <a:rPr lang="en-US" sz="1300" dirty="0">
+                <a:solidFill>
+                  <a:srgbClr val="8A9BAD"/>
+                </a:solidFill>
+                <a:latin typeface="Open Sans" pitchFamily="34" charset="0"/>
+                <a:ea typeface="Open Sans" pitchFamily="34" charset="-122"/>
+                <a:cs typeface="Open Sans" pitchFamily="34" charset="-120"/>
+              </a:rPr>
+              <a:t>Start with the web app. Graduate to Claude Code when you’re ready.</a:t>
+            </a:r>
+            <a:endParaRPr lang="en-US" sz="1300" dirty="0"/>
+          </a:p>
+        </p:txBody>
+      </p:sp>
+      <p:sp>
+        <p:nvSpPr>
+          <p:cNvPr id="28" name="Text 26"/>
+          <p:cNvSpPr/>
+          <p:nvPr/>
+        </p:nvSpPr>
+        <p:spPr>
+          <a:xfrm>
+            <a:off x="457200" y="4663440"/>
+            <a:ext cx="8229600" cy="320040"/>
+          </a:xfrm>
+          <a:prstGeom prst="rect">
+            <a:avLst/>
+          </a:prstGeom>
+          <a:noFill/>
+          <a:ln/>
+        </p:spPr>
+        <p:txBody>
+          <a:bodyPr wrap="square" lIns="0" tIns="0" rIns="0" bIns="0" rtlCol="0" anchor="ctr"/>
+          <a:lstStyle/>
+          <a:p>
+            <a:pPr marL="0" indent="0" algn="ctr">
+              <a:buNone/>
+            </a:pPr>
+            <a:r>
+              <a:rPr lang="en-US" sz="1000" dirty="0">
+                <a:solidFill>
+                  <a:srgbClr val="5A6B7A"/>
+                </a:solidFill>
+                <a:latin typeface="Open Sans" pitchFamily="34" charset="0"/>
+                <a:ea typeface="Open Sans" pitchFamily="34" charset="-122"/>
+                <a:cs typeface="Open Sans" pitchFamily="34" charset="-120"/>
+              </a:rPr>
+              <a:t>Shidler College of Business  |  University of Hawaiʻi at Mānoa  |  adamstau@hawaii.edu</a:t>
+            </a:r>
+            <a:endParaRPr lang="en-US" sz="1000" dirty="0"/>
           </a:p>
         </p:txBody>
       </p:sp>
@@ -12163,7 +12163,7 @@
                 <a:ea typeface="Open Sans" pitchFamily="34" charset="-122"/>
                 <a:cs typeface="Open Sans" pitchFamily="34" charset="-120"/>
               </a:rPr>
-              <a:t>Create an account with your @hawaii.edu email</a:t>
+              <a:t>Create a claude.ai account with any email you keep</a:t>
             </a:r>
             <a:endParaRPr lang="en-US" sz="1300" dirty="0"/>
           </a:p>
